--- a/Презентация_FitClub.pptx
+++ b/Презентация_FitClub.pptx
@@ -309,7 +309,7 @@
           <a:p>
             <a:fld id="{5BCAD085-E8A6-8845-BD4E-CB4CCA059FC4}" type="datetimeFigureOut">
               <a:rPr lang="en-US" smtClean="0"/>
-              <a:t>5/3/2026</a:t>
+              <a:t>5/4/2026</a:t>
             </a:fld>
             <a:endParaRPr lang="en-US"/>
           </a:p>
@@ -477,7 +477,7 @@
           <a:p>
             <a:fld id="{5BCAD085-E8A6-8845-BD4E-CB4CCA059FC4}" type="datetimeFigureOut">
               <a:rPr lang="en-US" smtClean="0"/>
-              <a:t>5/3/2026</a:t>
+              <a:t>5/4/2026</a:t>
             </a:fld>
             <a:endParaRPr lang="en-US"/>
           </a:p>
@@ -655,7 +655,7 @@
           <a:p>
             <a:fld id="{5BCAD085-E8A6-8845-BD4E-CB4CCA059FC4}" type="datetimeFigureOut">
               <a:rPr lang="en-US" smtClean="0"/>
-              <a:t>5/3/2026</a:t>
+              <a:t>5/4/2026</a:t>
             </a:fld>
             <a:endParaRPr lang="en-US"/>
           </a:p>
@@ -823,7 +823,7 @@
           <a:p>
             <a:fld id="{5BCAD085-E8A6-8845-BD4E-CB4CCA059FC4}" type="datetimeFigureOut">
               <a:rPr lang="en-US" smtClean="0"/>
-              <a:t>5/3/2026</a:t>
+              <a:t>5/4/2026</a:t>
             </a:fld>
             <a:endParaRPr lang="en-US"/>
           </a:p>
@@ -1068,7 +1068,7 @@
           <a:p>
             <a:fld id="{5BCAD085-E8A6-8845-BD4E-CB4CCA059FC4}" type="datetimeFigureOut">
               <a:rPr lang="en-US" smtClean="0"/>
-              <a:t>5/3/2026</a:t>
+              <a:t>5/4/2026</a:t>
             </a:fld>
             <a:endParaRPr lang="en-US"/>
           </a:p>
@@ -1353,7 +1353,7 @@
           <a:p>
             <a:fld id="{5BCAD085-E8A6-8845-BD4E-CB4CCA059FC4}" type="datetimeFigureOut">
               <a:rPr lang="en-US" smtClean="0"/>
-              <a:t>5/3/2026</a:t>
+              <a:t>5/4/2026</a:t>
             </a:fld>
             <a:endParaRPr lang="en-US"/>
           </a:p>
@@ -1772,7 +1772,7 @@
           <a:p>
             <a:fld id="{5BCAD085-E8A6-8845-BD4E-CB4CCA059FC4}" type="datetimeFigureOut">
               <a:rPr lang="en-US" smtClean="0"/>
-              <a:t>5/3/2026</a:t>
+              <a:t>5/4/2026</a:t>
             </a:fld>
             <a:endParaRPr lang="en-US"/>
           </a:p>
@@ -1889,7 +1889,7 @@
           <a:p>
             <a:fld id="{5BCAD085-E8A6-8845-BD4E-CB4CCA059FC4}" type="datetimeFigureOut">
               <a:rPr lang="en-US" smtClean="0"/>
-              <a:t>5/3/2026</a:t>
+              <a:t>5/4/2026</a:t>
             </a:fld>
             <a:endParaRPr lang="en-US"/>
           </a:p>
@@ -1984,7 +1984,7 @@
           <a:p>
             <a:fld id="{5BCAD085-E8A6-8845-BD4E-CB4CCA059FC4}" type="datetimeFigureOut">
               <a:rPr lang="en-US" smtClean="0"/>
-              <a:t>5/3/2026</a:t>
+              <a:t>5/4/2026</a:t>
             </a:fld>
             <a:endParaRPr lang="en-US"/>
           </a:p>
@@ -2259,7 +2259,7 @@
           <a:p>
             <a:fld id="{5BCAD085-E8A6-8845-BD4E-CB4CCA059FC4}" type="datetimeFigureOut">
               <a:rPr lang="en-US" smtClean="0"/>
-              <a:t>5/3/2026</a:t>
+              <a:t>5/4/2026</a:t>
             </a:fld>
             <a:endParaRPr lang="en-US"/>
           </a:p>
@@ -2511,7 +2511,7 @@
           <a:p>
             <a:fld id="{5BCAD085-E8A6-8845-BD4E-CB4CCA059FC4}" type="datetimeFigureOut">
               <a:rPr lang="en-US" smtClean="0"/>
-              <a:t>5/3/2026</a:t>
+              <a:t>5/4/2026</a:t>
             </a:fld>
             <a:endParaRPr lang="en-US"/>
           </a:p>
@@ -2722,7 +2722,7 @@
           <a:p>
             <a:fld id="{5BCAD085-E8A6-8845-BD4E-CB4CCA059FC4}" type="datetimeFigureOut">
               <a:rPr lang="en-US" smtClean="0"/>
-              <a:t>5/3/2026</a:t>
+              <a:t>5/4/2026</a:t>
             </a:fld>
             <a:endParaRPr lang="en-US"/>
           </a:p>
@@ -5083,7 +5083,7 @@
         </p:nvSpPr>
         <p:spPr>
           <a:xfrm>
-            <a:off x="731520" y="731520"/>
+            <a:off x="1755987" y="392369"/>
             <a:ext cx="10728655" cy="731520"/>
           </a:xfrm>
           <a:prstGeom prst="rect">
@@ -5106,35 +5106,29 @@
               </a:defRPr>
             </a:pPr>
             <a:r>
-              <a:t>Структура программной системы</a:t>
-            </a:r>
-          </a:p>
-        </p:txBody>
-      </p:sp>
-      <p:pic>
-        <p:nvPicPr>
-          <p:cNvPr id="5" name="Picture 4" descr="architecture_concept.png"/>
-          <p:cNvPicPr>
-            <a:picLocks noChangeAspect="1"/>
-          </p:cNvPicPr>
-          <p:nvPr/>
-        </p:nvPicPr>
-        <p:blipFill>
-          <a:blip r:embed="rId2"/>
-          <a:stretch>
-            <a:fillRect/>
-          </a:stretch>
-        </p:blipFill>
-        <p:spPr>
-          <a:xfrm>
-            <a:off x="548640" y="1828800"/>
-            <a:ext cx="5029200" cy="3200400"/>
-          </a:xfrm>
-          <a:prstGeom prst="rect">
-            <a:avLst/>
-          </a:prstGeom>
-        </p:spPr>
-      </p:pic>
+              <a:rPr dirty="0" err="1"/>
+              <a:t>Структура</a:t>
+            </a:r>
+            <a:r>
+              <a:rPr dirty="0"/>
+              <a:t> </a:t>
+            </a:r>
+            <a:r>
+              <a:rPr dirty="0" err="1"/>
+              <a:t>программной</a:t>
+            </a:r>
+            <a:r>
+              <a:rPr dirty="0"/>
+              <a:t> </a:t>
+            </a:r>
+            <a:r>
+              <a:rPr dirty="0" err="1"/>
+              <a:t>системы</a:t>
+            </a:r>
+            <a:endParaRPr dirty="0"/>
+          </a:p>
+        </p:txBody>
+      </p:sp>
       <p:sp>
         <p:nvSpPr>
           <p:cNvPr id="7" name="TextBox 6"/>
@@ -5194,10 +5188,16 @@
           <p:cNvGraphicFramePr>
             <a:graphicFrameLocks noGrp="1"/>
           </p:cNvGraphicFramePr>
-          <p:nvPr/>
+          <p:nvPr>
+            <p:extLst>
+              <p:ext uri="{D42A27DB-BD31-4B8C-83A1-F6EECF244321}">
+                <p14:modId xmlns:p14="http://schemas.microsoft.com/office/powerpoint/2010/main" val="3080655045"/>
+              </p:ext>
+            </p:extLst>
+          </p:nvPr>
         </p:nvGraphicFramePr>
         <p:xfrm>
-          <a:off x="6217920" y="2468880"/>
+          <a:off x="5110094" y="2465493"/>
           <a:ext cx="5120640" cy="2468880"/>
         </p:xfrm>
         <a:graphic>
@@ -5237,8 +5237,10 @@
                         </a:defRPr>
                       </a:pPr>
                       <a:r>
+                        <a:rPr dirty="0" err="1"/>
                         <a:t>Модуль</a:t>
                       </a:r>
+                      <a:endParaRPr dirty="0"/>
                     </a:p>
                   </a:txBody>
                   <a:tcPr>
@@ -5536,8 +5538,26 @@
                         </a:defRPr>
                       </a:pPr>
                       <a:r>
-                        <a:t>Статистика посещаемости и продаж</a:t>
+                        <a:rPr dirty="0" err="1"/>
+                        <a:t>Статистика</a:t>
                       </a:r>
+                      <a:r>
+                        <a:rPr dirty="0"/>
+                        <a:t> </a:t>
+                      </a:r>
+                      <a:r>
+                        <a:rPr dirty="0" err="1"/>
+                        <a:t>посещаемости</a:t>
+                      </a:r>
+                      <a:r>
+                        <a:rPr dirty="0"/>
+                        <a:t> и </a:t>
+                      </a:r>
+                      <a:r>
+                        <a:rPr dirty="0" err="1"/>
+                        <a:t>продаж</a:t>
+                      </a:r>
+                      <a:endParaRPr dirty="0"/>
                     </a:p>
                   </a:txBody>
                   <a:tcPr>
@@ -5564,8 +5584,8 @@
         </p:nvSpPr>
         <p:spPr>
           <a:xfrm>
-            <a:off x="822960" y="5532120"/>
-            <a:ext cx="10515600" cy="640080"/>
+            <a:off x="3242733" y="5681990"/>
+            <a:ext cx="8855363" cy="523220"/>
           </a:xfrm>
           <a:prstGeom prst="rect">
             <a:avLst/>
@@ -5587,11 +5607,72 @@
               </a:defRPr>
             </a:pPr>
             <a:r>
-              <a:t>Классы: User → Client / Coach / Admin (наследование) · Subscription · Training · Booking    |    Интеграция: Bottom-Up (снизу вверх)</a:t>
-            </a:r>
-          </a:p>
-        </p:txBody>
-      </p:sp>
+              <a:rPr dirty="0" err="1"/>
+              <a:t>Классы</a:t>
+            </a:r>
+            <a:r>
+              <a:rPr dirty="0"/>
+              <a:t>: User → Client / Coach / Admin (</a:t>
+            </a:r>
+            <a:r>
+              <a:rPr dirty="0" err="1"/>
+              <a:t>наследование</a:t>
+            </a:r>
+            <a:r>
+              <a:rPr dirty="0"/>
+              <a:t>) · Subscription · Training · Booking    |    </a:t>
+            </a:r>
+            <a:r>
+              <a:rPr dirty="0" err="1"/>
+              <a:t>Интеграция</a:t>
+            </a:r>
+            <a:r>
+              <a:rPr dirty="0"/>
+              <a:t>: Bottom-Up (</a:t>
+            </a:r>
+            <a:r>
+              <a:rPr dirty="0" err="1"/>
+              <a:t>снизу</a:t>
+            </a:r>
+            <a:r>
+              <a:rPr dirty="0"/>
+              <a:t> </a:t>
+            </a:r>
+            <a:r>
+              <a:rPr dirty="0" err="1"/>
+              <a:t>вверх</a:t>
+            </a:r>
+            <a:r>
+              <a:rPr dirty="0"/>
+              <a:t>)</a:t>
+            </a:r>
+          </a:p>
+        </p:txBody>
+      </p:sp>
+      <p:pic>
+        <p:nvPicPr>
+          <p:cNvPr id="11" name="Picture 10" descr="new_diagram.png"/>
+          <p:cNvPicPr>
+            <a:picLocks noChangeAspect="1"/>
+          </p:cNvPicPr>
+          <p:nvPr/>
+        </p:nvPicPr>
+        <p:blipFill>
+          <a:blip r:embed="rId3"/>
+          <a:stretch>
+            <a:fillRect/>
+          </a:stretch>
+        </p:blipFill>
+        <p:spPr>
+          <a:xfrm>
+            <a:off x="0" y="0"/>
+            <a:ext cx="3242733" cy="6858000"/>
+          </a:xfrm>
+          <a:prstGeom prst="rect">
+            <a:avLst/>
+          </a:prstGeom>
+        </p:spPr>
+      </p:pic>
     </p:spTree>
   </p:cSld>
   <p:clrMapOvr>
